--- a/decks/englit-romeo/englit-romeo_ch3_love-at-first-sight.pptx
+++ b/decks/englit-romeo/englit-romeo_ch3_love-at-first-sight.pptx
@@ -125,29 +125,29 @@
   <p:extLst>
     <p:ext uri="{521415D9-36F7-43E2-AB2F-B90AF26B5E84}">
       <p14:sectionLst xmlns:p14="http://schemas.microsoft.com/office/powerpoint/2010/main">
-        <p14:section name="Opening" id="{db18aaf7-0f10-b2b7-5287-f37bab8b72d4}">
+        <p14:section name="Opening" id="{5b1e18bb-dab7-3875-14f2-6e0c3549113f}">
           <p14:sldIdLst>
             <p14:sldId id="256"/>
           </p14:sldIdLst>
         </p14:section>
-        <p14:section name="Gate" id="{ef923b82-0ad9-878c-e51c-b49eea5f95ad}">
+        <p14:section name="Gate" id="{13770a53-32ce-b522-86ab-d45bcfde6309}">
           <p14:sldIdLst>
             <p14:sldId id="257"/>
             <p14:sldId id="258"/>
           </p14:sldIdLst>
         </p14:section>
-        <p14:section name="Pre-teach" id="{1f961a9b-3062-3a40-8b7a-e132e6c0eef8}">
+        <p14:section name="Pre-teach" id="{c8a85076-6b96-57b5-c402-b536e9e06f9b}">
           <p14:sldIdLst>
             <p14:sldId id="259"/>
           </p14:sldIdLst>
         </p14:section>
-        <p14:section name="Read-along" id="{0241bcdc-401b-8d56-290e-512cd2257557}">
+        <p14:section name="Read-along" id="{61ec741a-3033-81b4-5ab3-eea08a16a5c3}">
           <p14:sldIdLst>
             <p14:sldId id="260"/>
             <p14:sldId id="261"/>
           </p14:sldIdLst>
         </p14:section>
-        <p14:section name="Teach" id="{5284c478-b910-dfe0-4500-f94df15a8289}">
+        <p14:section name="Teach" id="{74dce887-32cd-b40d-d49a-a8bd93140210}">
           <p14:sldIdLst>
             <p14:sldId id="262"/>
             <p14:sldId id="263"/>
@@ -155,7 +155,7 @@
             <p14:sldId id="265"/>
           </p14:sldIdLst>
         </p14:section>
-        <p14:section name="Routes" id="{e61cd748-fa5d-90fa-7d95-8f3549d8fd4a}">
+        <p14:section name="Routes" id="{79c1a225-172f-630a-5489-394e2eccaaef}">
           <p14:sldIdLst>
             <p14:sldId id="266"/>
             <p14:sldId id="267"/>
@@ -163,12 +163,12 @@
             <p14:sldId id="269"/>
           </p14:sldIdLst>
         </p14:section>
-        <p14:section name="Close" id="{6996b72e-6293-9bfe-63d9-e912d9da5774}">
+        <p14:section name="Close" id="{edfc6ea8-b865-57f3-612e-4e8b685c0e39}">
           <p14:sldIdLst>
             <p14:sldId id="270"/>
           </p14:sldIdLst>
         </p14:section>
-        <p14:section name="Answers" id="{a9cdb574-9bac-262f-0b7a-095377d22cf3}">
+        <p14:section name="Answers" id="{58fdffa2-d2a9-6dc1-8b69-39ed2c862cf9}">
           <p14:sldIdLst>
             <p14:sldId id="271"/>
             <p14:sldId id="272"/>
@@ -1600,9 +1600,9 @@
             <a:r>
               <a:rPr lang="en-US" dirty="0"/>
               <a:t>Do now — retrieval. Silent, no notes, no help: recall comes before any support. Give about four minutes.
-1. Why is Mercutio described as a foil to Romeo?  →  B   He contrasts with Romeo, mocking the love Romeo takes seriously
+1. Why is Mercutio described as a foil to Romeo?  →  C   He contrasts with Romeo, mocking the love Romeo takes seriously
 2. Shrine, pilgrim, saint and prayer are all words about religion. A group of words linked by meaning is called a ___ field.  →  semantic
-3. In Act 2 Scene 2, what does Juliet say would smell as sweet by any other word?  →  B   A rose
+3. In Act 2 Scene 2, what does Juliet say would smell as sweet by any other word?  →  A   A rose
 Circulate: who gets 3/3 (Stretch route), 2/3 (Core), 0–1 (Support)? Use this to route pupils later in the lesson.</a:t>
             </a:r>
             <a:endParaRPr lang="en-US" dirty="0"/>
@@ -1692,9 +1692,9 @@
             <a:r>
               <a:rPr lang="en-US" dirty="0"/>
               <a:t>Answers — pupils mark their own in a different colour, then hands up for 3/3, 2/3, 1/3.
-1. B   He contrasts with Romeo, mocking the love Romeo takes seriously. A foil is a contrasting character. Mercutio's jokes about love show up how serious and dreamy Romeo is.
+1. C   He contrasts with Romeo, mocking the love Romeo takes seriously. A foil is a contrasting character. Mercutio's jokes about love show up how serious and dreamy Romeo is.
 2. semantic. A semantic field is a set of words that share a subject. Romeo and Juliet's religious words make their love sound holy.
-3. B   A rose. Juliet argues that a rose would smell as sweet whatever we called it, so Romeo would still be Romeo without the name Montague.
+3. A   A rose. Juliet argues that a rose would smell as sweet whatever we called it, so Romeo would still be Romeo without the name Montague.
 Say the route each score points to: 3/3 Stretch, 2/3 Core, 0–1 Support. Pupils may choose to move up.</a:t>
             </a:r>
             <a:endParaRPr lang="en-US" dirty="0"/>
@@ -11148,7 +11148,7 @@
                 <a:ea typeface="Calibri" pitchFamily="34" charset="-122"/>
                 <a:cs typeface="Calibri" pitchFamily="34" charset="-120"/>
               </a:rPr>
-              <a:t>He is Romeo's enemy</a:t>
+              <a:t>He looks exactly like Romeo</a:t>
             </a:r>
             <a:endParaRPr lang="en-US" sz="1800" dirty="0"/>
           </a:p>
@@ -11185,7 +11185,7 @@
                 <a:ea typeface="Calibri" pitchFamily="34" charset="-122"/>
                 <a:cs typeface="Calibri" pitchFamily="34" charset="-120"/>
               </a:rPr>
-              <a:t>He contrasts with Romeo, mocking the love Romeo takes seriously</a:t>
+              <a:t>He is Romeo's enemy</a:t>
             </a:r>
             <a:endParaRPr lang="en-US" sz="1800" dirty="0"/>
           </a:p>
@@ -11222,7 +11222,7 @@
                 <a:ea typeface="Calibri" pitchFamily="34" charset="-122"/>
                 <a:cs typeface="Calibri" pitchFamily="34" charset="-120"/>
               </a:rPr>
-              <a:t>He looks exactly like Romeo</a:t>
+              <a:t>He contrasts with Romeo, mocking the love Romeo takes seriously</a:t>
             </a:r>
             <a:endParaRPr lang="en-US" sz="1800" dirty="0"/>
           </a:p>
@@ -11661,7 +11661,7 @@
                 <a:ea typeface="Calibri" pitchFamily="34" charset="-122"/>
                 <a:cs typeface="Calibri" pitchFamily="34" charset="-120"/>
               </a:rPr>
-              <a:t>A lily</a:t>
+              <a:t>A rose</a:t>
             </a:r>
             <a:endParaRPr lang="en-US" sz="2400" dirty="0"/>
           </a:p>
@@ -11698,7 +11698,7 @@
                 <a:ea typeface="Calibri" pitchFamily="34" charset="-122"/>
                 <a:cs typeface="Calibri" pitchFamily="34" charset="-120"/>
               </a:rPr>
-              <a:t>A rose</a:t>
+              <a:t>A lily</a:t>
             </a:r>
             <a:endParaRPr lang="en-US" sz="2400" dirty="0"/>
           </a:p>
@@ -11735,7 +11735,7 @@
                 <a:ea typeface="Calibri" pitchFamily="34" charset="-122"/>
                 <a:cs typeface="Calibri" pitchFamily="34" charset="-120"/>
               </a:rPr>
-              <a:t>A violet</a:t>
+              <a:t>An apple</a:t>
             </a:r>
             <a:endParaRPr lang="en-US" sz="2400" dirty="0"/>
           </a:p>
@@ -11772,7 +11772,7 @@
                 <a:ea typeface="Calibri" pitchFamily="34" charset="-122"/>
                 <a:cs typeface="Calibri" pitchFamily="34" charset="-120"/>
               </a:rPr>
-              <a:t>An apple</a:t>
+              <a:t>A violet</a:t>
             </a:r>
             <a:endParaRPr lang="en-US" sz="2400" dirty="0"/>
           </a:p>
@@ -12173,7 +12173,7 @@
                 <a:ea typeface="Calibri" pitchFamily="34" charset="-122"/>
                 <a:cs typeface="Calibri" pitchFamily="34" charset="-120"/>
               </a:rPr>
-              <a:t>B   He contrasts with Romeo, mocking the love Romeo takes seriously</a:t>
+              <a:t>C   He contrasts with Romeo, mocking the love Romeo takes seriously</a:t>
             </a:r>
             <a:endParaRPr lang="en-US" sz="2200" dirty="0"/>
           </a:p>
@@ -12633,7 +12633,7 @@
                 <a:ea typeface="Calibri" pitchFamily="34" charset="-122"/>
                 <a:cs typeface="Calibri" pitchFamily="34" charset="-120"/>
               </a:rPr>
-              <a:t>B   A rose</a:t>
+              <a:t>A   A rose</a:t>
             </a:r>
             <a:endParaRPr lang="en-US" sz="2200" dirty="0"/>
           </a:p>

--- a/decks/englit-romeo/englit-romeo_ch3_love-at-first-sight.pptx
+++ b/decks/englit-romeo/englit-romeo_ch3_love-at-first-sight.pptx
@@ -125,29 +125,29 @@
   <p:extLst>
     <p:ext uri="{521415D9-36F7-43E2-AB2F-B90AF26B5E84}">
       <p14:sectionLst xmlns:p14="http://schemas.microsoft.com/office/powerpoint/2010/main">
-        <p14:section name="Opening" id="{5b1e18bb-dab7-3875-14f2-6e0c3549113f}">
+        <p14:section name="Opening" id="{f330a98f-ca0c-1438-ac78-55ae37622170}">
           <p14:sldIdLst>
             <p14:sldId id="256"/>
           </p14:sldIdLst>
         </p14:section>
-        <p14:section name="Gate" id="{13770a53-32ce-b522-86ab-d45bcfde6309}">
+        <p14:section name="Gate" id="{ea29f025-146d-7fcc-a93d-4778e9ae4e23}">
           <p14:sldIdLst>
             <p14:sldId id="257"/>
             <p14:sldId id="258"/>
           </p14:sldIdLst>
         </p14:section>
-        <p14:section name="Pre-teach" id="{c8a85076-6b96-57b5-c402-b536e9e06f9b}">
+        <p14:section name="Pre-teach" id="{c26e3cf8-4627-152f-232a-d8937234b820}">
           <p14:sldIdLst>
             <p14:sldId id="259"/>
           </p14:sldIdLst>
         </p14:section>
-        <p14:section name="Read-along" id="{61ec741a-3033-81b4-5ab3-eea08a16a5c3}">
+        <p14:section name="Read-along" id="{2fd79cf9-e117-919a-5b9a-2608ebce58d6}">
           <p14:sldIdLst>
             <p14:sldId id="260"/>
             <p14:sldId id="261"/>
           </p14:sldIdLst>
         </p14:section>
-        <p14:section name="Teach" id="{74dce887-32cd-b40d-d49a-a8bd93140210}">
+        <p14:section name="Teach" id="{a2243358-bb54-0e8e-d0c0-7be5274254c0}">
           <p14:sldIdLst>
             <p14:sldId id="262"/>
             <p14:sldId id="263"/>
@@ -155,7 +155,7 @@
             <p14:sldId id="265"/>
           </p14:sldIdLst>
         </p14:section>
-        <p14:section name="Routes" id="{79c1a225-172f-630a-5489-394e2eccaaef}">
+        <p14:section name="Routes" id="{4814ed7d-49f4-cb1e-bbe0-05b5e179ccee}">
           <p14:sldIdLst>
             <p14:sldId id="266"/>
             <p14:sldId id="267"/>
@@ -163,12 +163,12 @@
             <p14:sldId id="269"/>
           </p14:sldIdLst>
         </p14:section>
-        <p14:section name="Close" id="{edfc6ea8-b865-57f3-612e-4e8b685c0e39}">
+        <p14:section name="Close" id="{e82c8019-9b69-cdd0-44d9-7bf4a1d08749}">
           <p14:sldIdLst>
             <p14:sldId id="270"/>
           </p14:sldIdLst>
         </p14:section>
-        <p14:section name="Answers" id="{58fdffa2-d2a9-6dc1-8b69-39ed2c862cf9}">
+        <p14:section name="Answers" id="{40d25251-d0a4-cf65-ec97-dce25cd90a9c}">
           <p14:sldIdLst>
             <p14:sldId id="271"/>
             <p14:sldId id="272"/>
